--- a/downloads/neo-pop-business.pptx
+++ b/downloads/neo-pop-business.pptx
@@ -3528,7 +3528,7 @@
                 </a:solidFill>
                 <a:latin typeface="Calibri"/>
               </a:rPr>
-              <a:t>אנחנו לא עוד עסק אפור. אנחנו כאן כדי לזעזע, להפתיע ולגרום לכם להרגיש משהו. כל פרויקט הוא הזדמנות לעשות את זה אחרת — בגדול, בצבעוני, ובלי פחד.</a:t>
+              <a:t>אנחנו לא עוד עסק אפור. אנחנו כאן כדי לעורר, להפתיע ולגרום לכם להרגיש משהו. כל פרויקט הוא הזדמנות לעשות את זה אחרת — בגדול, בצבע ובלי פחד.</a:t>
             </a:r>
           </a:p>
         </p:txBody>
@@ -3638,14 +3638,14 @@
     </p:bg>
     <p:spTree>
       <p:nvGrpSpPr>
-        <p:cNvPr id="1" name=""/>
+        <p:cNvPr id="2" name=""/>
         <p:cNvGrpSpPr/>
         <p:nvPr/>
       </p:nvGrpSpPr>
       <p:grpSpPr/>
       <p:sp>
         <p:nvSpPr>
-          <p:cNvPr id="2" name="Rectangle 1"/>
+          <p:cNvPr id="3" name="Rectangle 1"/>
           <p:cNvSpPr/>
           <p:nvPr/>
         </p:nvSpPr>
@@ -3689,7 +3689,7 @@
       </p:sp>
       <p:sp>
         <p:nvSpPr>
-          <p:cNvPr id="3" name="TextBox 2"/>
+          <p:cNvPr id="4" name="TextBox 2"/>
           <p:cNvSpPr txBox="1"/>
           <p:nvPr/>
         </p:nvSpPr>
@@ -3724,7 +3724,7 @@
       </p:sp>
       <p:sp>
         <p:nvSpPr>
-          <p:cNvPr id="4" name="Rounded Rectangle 3"/>
+          <p:cNvPr id="5" name="Rounded Rectangle 3"/>
           <p:cNvSpPr/>
           <p:nvPr/>
         </p:nvSpPr>
@@ -3770,7 +3770,7 @@
       </p:sp>
       <p:sp>
         <p:nvSpPr>
-          <p:cNvPr id="5" name="TextBox 4"/>
+          <p:cNvPr id="6" name="TextBox 4"/>
           <p:cNvSpPr txBox="1"/>
           <p:nvPr/>
         </p:nvSpPr>
@@ -3805,13 +3805,13 @@
       </p:sp>
       <p:sp>
         <p:nvSpPr>
-          <p:cNvPr id="6" name="TextBox 5"/>
+          <p:cNvPr id="7" name="TextBox 5"/>
           <p:cNvSpPr txBox="1"/>
           <p:nvPr/>
         </p:nvSpPr>
         <p:spPr>
           <a:xfrm>
-            <a:off x="8394192" y="4023360"/>
+            <a:off x="8394192" y="3017520"/>
             <a:ext cx="2743200" cy="822960"/>
           </a:xfrm>
           <a:prstGeom prst="rect">
@@ -3840,7 +3840,42 @@
       </p:sp>
       <p:sp>
         <p:nvSpPr>
-          <p:cNvPr id="7" name="Rounded Rectangle 6"/>
+          <p:cNvPr id="8" name="TextBox 5"/>
+          <p:cNvSpPr txBox="1"/>
+          <p:nvPr/>
+        </p:nvSpPr>
+        <p:spPr>
+          <a:xfrm>
+            <a:off x="8394192" y="3703320"/>
+            <a:ext cx="2743200" cy="822960"/>
+          </a:xfrm>
+          <a:prstGeom prst="rect">
+            <a:avLst/>
+          </a:prstGeom>
+          <a:noFill/>
+        </p:spPr>
+        <p:txBody>
+          <a:bodyPr wrap="square" anchor="t">
+            <a:spAutoFit/>
+          </a:bodyPr>
+          <a:lstStyle/>
+          <a:p>
+            <a:pPr algn="ctr" rtl="1"/>
+            <a:r>
+              <a:rPr sz="1500" b="0" i="0">
+                <a:solidFill>
+                  <a:srgbClr val="000000"/>
+                </a:solidFill>
+                <a:latin typeface="Calibri"/>
+              </a:rPr>
+              <a:t>רעיונות נועזים ועיצוב שאי אפשר לפספס</a:t>
+            </a:r>
+          </a:p>
+        </p:txBody>
+      </p:sp>
+      <p:sp>
+        <p:nvSpPr>
+          <p:cNvPr id="9" name="Rounded Rectangle 6"/>
           <p:cNvSpPr/>
           <p:nvPr/>
         </p:nvSpPr>
@@ -3886,7 +3921,7 @@
       </p:sp>
       <p:sp>
         <p:nvSpPr>
-          <p:cNvPr id="8" name="TextBox 7"/>
+          <p:cNvPr id="10" name="TextBox 7"/>
           <p:cNvSpPr txBox="1"/>
           <p:nvPr/>
         </p:nvSpPr>
@@ -3921,13 +3956,13 @@
       </p:sp>
       <p:sp>
         <p:nvSpPr>
-          <p:cNvPr id="9" name="TextBox 8"/>
+          <p:cNvPr id="11" name="TextBox 8"/>
           <p:cNvSpPr txBox="1"/>
           <p:nvPr/>
         </p:nvSpPr>
         <p:spPr>
           <a:xfrm>
-            <a:off x="4828032" y="4023360"/>
+            <a:off x="4828032" y="3017520"/>
             <a:ext cx="2743200" cy="822960"/>
           </a:xfrm>
           <a:prstGeom prst="rect">
@@ -3956,7 +3991,42 @@
       </p:sp>
       <p:sp>
         <p:nvSpPr>
-          <p:cNvPr id="10" name="Rounded Rectangle 9"/>
+          <p:cNvPr id="12" name="TextBox 8"/>
+          <p:cNvSpPr txBox="1"/>
+          <p:nvPr/>
+        </p:nvSpPr>
+        <p:spPr>
+          <a:xfrm>
+            <a:off x="4828032" y="3703320"/>
+            <a:ext cx="2743200" cy="822960"/>
+          </a:xfrm>
+          <a:prstGeom prst="rect">
+            <a:avLst/>
+          </a:prstGeom>
+          <a:noFill/>
+        </p:spPr>
+        <p:txBody>
+          <a:bodyPr wrap="square" anchor="t">
+            <a:spAutoFit/>
+          </a:bodyPr>
+          <a:lstStyle/>
+          <a:p>
+            <a:pPr algn="ctr" rtl="1"/>
+            <a:r>
+              <a:rPr sz="1500" b="0" i="0">
+                <a:solidFill>
+                  <a:srgbClr val="000000"/>
+                </a:solidFill>
+                <a:latin typeface="Calibri"/>
+              </a:rPr>
+              <a:t>תוכנית חכמה שמכוונת בדיוק לקהל שלכם</a:t>
+            </a:r>
+          </a:p>
+        </p:txBody>
+      </p:sp>
+      <p:sp>
+        <p:nvSpPr>
+          <p:cNvPr id="13" name="Rounded Rectangle 9"/>
           <p:cNvSpPr/>
           <p:nvPr/>
         </p:nvSpPr>
@@ -4002,7 +4072,7 @@
       </p:sp>
       <p:sp>
         <p:nvSpPr>
-          <p:cNvPr id="11" name="TextBox 10"/>
+          <p:cNvPr id="14" name="TextBox 10"/>
           <p:cNvSpPr txBox="1"/>
           <p:nvPr/>
         </p:nvSpPr>
@@ -4037,13 +4107,13 @@
       </p:sp>
       <p:sp>
         <p:nvSpPr>
-          <p:cNvPr id="12" name="TextBox 11"/>
+          <p:cNvPr id="15" name="TextBox 11"/>
           <p:cNvSpPr txBox="1"/>
           <p:nvPr/>
         </p:nvSpPr>
         <p:spPr>
           <a:xfrm>
-            <a:off x="1261872" y="4023360"/>
+            <a:off x="1261872" y="3017520"/>
             <a:ext cx="2743200" cy="822960"/>
           </a:xfrm>
           <a:prstGeom prst="rect">
@@ -4066,6 +4136,41 @@
                 <a:latin typeface="Calibri"/>
               </a:rPr>
               <a:t>ביצוע</a:t>
+            </a:r>
+          </a:p>
+        </p:txBody>
+      </p:sp>
+      <p:sp>
+        <p:nvSpPr>
+          <p:cNvPr id="16" name="TextBox 11"/>
+          <p:cNvSpPr txBox="1"/>
+          <p:nvPr/>
+        </p:nvSpPr>
+        <p:spPr>
+          <a:xfrm>
+            <a:off x="1261872" y="3703320"/>
+            <a:ext cx="2743200" cy="822960"/>
+          </a:xfrm>
+          <a:prstGeom prst="rect">
+            <a:avLst/>
+          </a:prstGeom>
+          <a:noFill/>
+        </p:spPr>
+        <p:txBody>
+          <a:bodyPr wrap="square" anchor="t">
+            <a:spAutoFit/>
+          </a:bodyPr>
+          <a:lstStyle/>
+          <a:p>
+            <a:pPr algn="ctr" rtl="1"/>
+            <a:r>
+              <a:rPr sz="1500" b="0" i="0">
+                <a:solidFill>
+                  <a:srgbClr val="000000"/>
+                </a:solidFill>
+                <a:latin typeface="Calibri"/>
+              </a:rPr>
+              <a:t>מהרעיון לביצוע — מהר, מדויק ובלי תירוצים</a:t>
             </a:r>
           </a:p>
         </p:txBody>
